--- a/ai-case-library/research/ventures/grid-classic-deck.pptx
+++ b/ai-case-library/research/ventures/grid-classic-deck.pptx
@@ -5645,7 +5645,7 @@
                 <a:ea typeface="Arial" pitchFamily="34" charset="-122"/>
                 <a:cs typeface="Arial" pitchFamily="34" charset="-120"/>
               </a:rPr>
-              <a:t>маржа базового сценария после интеграции ИИ; при выработке ×2 — выше, при ×1,2 — убыток</a:t>
+              <a:t>маржа базового сценария — цель, не факт: сектор от ИИ пока +0,1 п.п.; при ×1,2 — убыток</a:t>
             </a:r>
             <a:endParaRPr lang="en-US" sz="1150" dirty="0"/>
           </a:p>
@@ -6345,7 +6345,7 @@
                 <a:ea typeface="Arial" pitchFamily="34" charset="-122"/>
                 <a:cs typeface="Arial" pitchFamily="34" charset="-120"/>
               </a:rPr>
-              <a:t>Стратег платит за инженера 445 тысяч. Мы покупаем за 70. </a:t>
+              <a:t>Крупных покупают по 445 тысяч за инженера. Мы покупаем за 70. </a:t>
             </a:r>
             <a:pPr indent="0" marL="0">
               <a:lnSpc>
@@ -6365,7 +6365,7 @@
                 <a:ea typeface="Arial" pitchFamily="34" charset="-122"/>
                 <a:cs typeface="Arial" pitchFamily="34" charset="-120"/>
               </a:rPr>
-              <a:t>Покупаем там, где инженеры есть и дёшевы; продаём тем, у кого их нет. Разрыв — и есть сделка.</a:t>
+              <a:t>Разрыв реален: малые фирмы 5–7× прибыли против 10,8× у фондов-покупателей. Но платят его за масштаб, не за ИИ — масштаб и собираем там, где инженеры дёшевы.</a:t>
             </a:r>
             <a:endParaRPr lang="en-US" sz="1400" dirty="0"/>
           </a:p>
@@ -6408,7 +6408,7 @@
                 <a:ea typeface="Arial" pitchFamily="34" charset="-122"/>
                 <a:cs typeface="Arial" pitchFamily="34" charset="-120"/>
               </a:rPr>
-              <a:t>Соседи стартовали (Marengo, Vela — YC 2026; ThinkLabs — 28 млн $), Black &amp; Veatch 27.08.2026 открыл вакансию менеджера ИИ-программ. В подключении к сети — пусто.</a:t>
+              <a:t>Соседи стартовали (Marengo, Vela — YC 2026; ThinkLabs — 28 млн $), Black &amp; Veatch 27.08.2026 открыл вакансию менеджера ИИ-программ. В подключении к сети покупки начались (E Source → CF Power, Littlejohn + GDS); в Заливе и Индии — никого.</a:t>
             </a:r>
             <a:endParaRPr lang="en-US" sz="1400" dirty="0"/>
           </a:p>
@@ -6447,7 +6447,7 @@
                 <a:ea typeface="Arial" pitchFamily="34" charset="-122"/>
                 <a:cs typeface="Arial" pitchFamily="34" charset="-120"/>
               </a:rPr>
-              <a:t>trade.gov (КСА 2025); 450 млн $ — оценка: 3% от 15 млрд $ по доле инжиниринга MISO; National Grid ETP; пресс-релизы WSP, ENR. 445 тыс. $ — цена по американским ставкам, направление рынка, не наш мультипликатор.</a:t>
+              <a:t>trade.gov (КСА 2025); 450 млн $ — оценка: 3% от 15 млрд $ по доле инжиниринга MISO; National Grid ETP; пресс-релизы WSP, ENR. 445 тыс. $ — за группу на 4000 человек; малые фирмы 5,4–7,5× — ROG Partners; фонды 10,75× против стратегов 7,34× — ACEC. Направление рынка, не наш мультипликатор.</a:t>
             </a:r>
             <a:endParaRPr lang="en-US" sz="950" dirty="0"/>
           </a:p>
@@ -6599,7 +6599,7 @@
                 <a:ea typeface="Arial" pitchFamily="34" charset="-122"/>
                 <a:cs typeface="Arial" pitchFamily="34" charset="-120"/>
               </a:rPr>
-              <a:t>Три года — пять фирм. Первый, кто соберёт группу, станет консолидатором</a:t>
+              <a:t>Три года — пять фирм. Консолидаторы есть — но не в Заливе и Индии</a:t>
             </a:r>
             <a:endParaRPr lang="en-US" sz="3000" dirty="0"/>
           </a:p>
@@ -6953,7 +6953,7 @@
                 <a:ea typeface="Arial" pitchFamily="34" charset="-122"/>
                 <a:cs typeface="Arial" pitchFamily="34" charset="-120"/>
               </a:rPr>
-              <a:t>Группа на 500 инженеров, база из сотен подключений. Тысяча инженеров — четверть POWER Engineers. Выход — стратегу: WSP, Stantec, Cyient.</a:t>
+              <a:t>Группа на 500 инженеров, база из сотен подключений. Тысяча инженеров — четверть POWER Engineers. Выход — фондам-консолидаторам: платят 10,8× против 7,3× у стратегов.</a:t>
             </a:r>
             <a:endParaRPr lang="en-US" sz="1250" dirty="0"/>
           </a:p>

--- a/ai-case-library/research/ventures/grid-classic-deck.pptx
+++ b/ai-case-library/research/ventures/grid-classic-deck.pptx
@@ -5645,7 +5645,7 @@
                 <a:ea typeface="Arial" pitchFamily="34" charset="-122"/>
                 <a:cs typeface="Arial" pitchFamily="34" charset="-120"/>
               </a:rPr>
-              <a:t>маржа базового сценария — цель, не факт: сектор от ИИ пока +0,1 п.п.; при ×1,2 — убыток</a:t>
+              <a:t>маржа базового сценария — цель, которую меряем часами на проект; при ×1,2 — убыток</a:t>
             </a:r>
             <a:endParaRPr lang="en-US" sz="1150" dirty="0"/>
           </a:p>
